--- a/assets/pptx/catalog-757.pptx
+++ b/assets/pptx/catalog-757.pptx
@@ -3299,7 +3299,7 @@
                 <a:ea typeface="Ebrima"/>
                 <a:cs typeface="Ebrima"/>
               </a:rPr>
-              <a:t>ለእኛ ግን ሕይወት ነው ሃሌሉያ (2x)</a:t>
+              <a:t>ለእኛ ግን ሕይወት ነው ሃሌሉያ 2x</a:t>
             </a:r>
           </a:p>
         </p:txBody>
@@ -3420,7 +3420,7 @@
                 <a:ea typeface="Ebrima"/>
                 <a:cs typeface="Ebrima"/>
               </a:rPr>
-              <a:t>ለማያምኑት ግን ጥፋት ነው (2x)</a:t>
+              <a:t>ለማያምኑት ግን ጥፋት ነው 2x</a:t>
             </a:r>
           </a:p>
         </p:txBody>
@@ -3541,7 +3541,7 @@
                 <a:ea typeface="Ebrima"/>
                 <a:cs typeface="Ebrima"/>
               </a:rPr>
-              <a:t>ለሚጠፉት ግን ሞት ነው (2x)</a:t>
+              <a:t>ለሚጠፉት ግን ሞት ነው 2x</a:t>
             </a:r>
           </a:p>
         </p:txBody>
@@ -3662,7 +3662,7 @@
                 <a:ea typeface="Ebrima"/>
                 <a:cs typeface="Ebrima"/>
               </a:rPr>
-              <a:t>የዘለዓለም ሕይወት ሰጥቶናል (2x)</a:t>
+              <a:t>የዘለዓለም ሕይወት ሰጥቶናል 2x</a:t>
             </a:r>
           </a:p>
         </p:txBody>
@@ -3783,7 +3783,7 @@
                 <a:ea typeface="Ebrima"/>
                 <a:cs typeface="Ebrima"/>
               </a:rPr>
-              <a:t>ሕይወት ሰላማችን ሃይላችን ነው (2x)</a:t>
+              <a:t>ሕይወት ሰላማችን ሃይላችን ነው 2x</a:t>
             </a:r>
           </a:p>
         </p:txBody>
